--- a/static/focus_banner/focus_banner.pptx
+++ b/static/focus_banner/focus_banner.pptx
@@ -4,6 +4,9 @@
   <p:sldMasterIdLst>
     <p:sldMasterId id="2147483648" r:id="rId1"/>
   </p:sldMasterIdLst>
+  <p:notesMasterIdLst>
+    <p:notesMasterId r:id="rId9"/>
+  </p:notesMasterIdLst>
   <p:sldIdLst>
     <p:sldId id="256" r:id="rId2"/>
     <p:sldId id="257" r:id="rId3"/>
@@ -129,6 +132,443 @@
 </p:presentation>
 </file>
 
+<file path=ppt/notesMasters/notesMaster1.xml><?xml version="1.0" encoding="utf-8"?>
+<p:notesMaster xmlns:a="http://schemas.openxmlformats.org/drawingml/2006/main" xmlns:r="http://schemas.openxmlformats.org/officeDocument/2006/relationships" xmlns:p="http://schemas.openxmlformats.org/presentationml/2006/main">
+  <p:cSld>
+    <p:bg>
+      <p:bgRef idx="1001">
+        <a:schemeClr val="bg1"/>
+      </p:bgRef>
+    </p:bg>
+    <p:spTree>
+      <p:nvGrpSpPr>
+        <p:cNvPr id="1" name=""/>
+        <p:cNvGrpSpPr/>
+        <p:nvPr/>
+      </p:nvGrpSpPr>
+      <p:grpSpPr>
+        <a:xfrm>
+          <a:off x="0" y="0"/>
+          <a:ext cx="0" cy="0"/>
+          <a:chOff x="0" y="0"/>
+          <a:chExt cx="0" cy="0"/>
+        </a:xfrm>
+      </p:grpSpPr>
+      <p:sp>
+        <p:nvSpPr>
+          <p:cNvPr id="2" name="머리글 개체 틀 1"/>
+          <p:cNvSpPr>
+            <a:spLocks noGrp="1"/>
+          </p:cNvSpPr>
+          <p:nvPr>
+            <p:ph type="hdr" sz="quarter"/>
+          </p:nvPr>
+        </p:nvSpPr>
+        <p:spPr>
+          <a:xfrm>
+            <a:off x="0" y="0"/>
+            <a:ext cx="2971800" cy="458788"/>
+          </a:xfrm>
+          <a:prstGeom prst="rect">
+            <a:avLst/>
+          </a:prstGeom>
+        </p:spPr>
+        <p:txBody>
+          <a:bodyPr vert="horz" lIns="91440" tIns="45720" rIns="91440" bIns="45720" rtlCol="0"/>
+          <a:lstStyle>
+            <a:lvl1pPr algn="l">
+              <a:defRPr sz="1200"/>
+            </a:lvl1pPr>
+          </a:lstStyle>
+          <a:p>
+            <a:endParaRPr kumimoji="1" lang="ko-KR" altLang="en-US"/>
+          </a:p>
+        </p:txBody>
+      </p:sp>
+      <p:sp>
+        <p:nvSpPr>
+          <p:cNvPr id="3" name="날짜 개체 틀 2"/>
+          <p:cNvSpPr>
+            <a:spLocks noGrp="1"/>
+          </p:cNvSpPr>
+          <p:nvPr>
+            <p:ph type="dt" idx="1"/>
+          </p:nvPr>
+        </p:nvSpPr>
+        <p:spPr>
+          <a:xfrm>
+            <a:off x="3884613" y="0"/>
+            <a:ext cx="2971800" cy="458788"/>
+          </a:xfrm>
+          <a:prstGeom prst="rect">
+            <a:avLst/>
+          </a:prstGeom>
+        </p:spPr>
+        <p:txBody>
+          <a:bodyPr vert="horz" lIns="91440" tIns="45720" rIns="91440" bIns="45720" rtlCol="0"/>
+          <a:lstStyle>
+            <a:lvl1pPr algn="r">
+              <a:defRPr sz="1200"/>
+            </a:lvl1pPr>
+          </a:lstStyle>
+          <a:p>
+            <a:fld id="{D2B96916-FD17-9645-834E-43812CA62CB1}" type="datetimeFigureOut">
+              <a:rPr kumimoji="1" lang="ko-KR" altLang="en-US" smtClean="0"/>
+              <a:t>2024. 11. 11.</a:t>
+            </a:fld>
+            <a:endParaRPr kumimoji="1" lang="ko-KR" altLang="en-US"/>
+          </a:p>
+        </p:txBody>
+      </p:sp>
+      <p:sp>
+        <p:nvSpPr>
+          <p:cNvPr id="4" name="슬라이드 이미지 개체 틀 3"/>
+          <p:cNvSpPr>
+            <a:spLocks noGrp="1" noRot="1" noChangeAspect="1"/>
+          </p:cNvSpPr>
+          <p:nvPr>
+            <p:ph type="sldImg" idx="2"/>
+          </p:nvPr>
+        </p:nvSpPr>
+        <p:spPr>
+          <a:xfrm>
+            <a:off x="685800" y="1143000"/>
+            <a:ext cx="5486400" cy="3086100"/>
+          </a:xfrm>
+          <a:prstGeom prst="rect">
+            <a:avLst/>
+          </a:prstGeom>
+          <a:noFill/>
+          <a:ln w="12700">
+            <a:solidFill>
+              <a:prstClr val="black"/>
+            </a:solidFill>
+          </a:ln>
+        </p:spPr>
+        <p:txBody>
+          <a:bodyPr vert="horz" lIns="91440" tIns="45720" rIns="91440" bIns="45720" rtlCol="0" anchor="ctr"/>
+          <a:lstStyle/>
+          <a:p>
+            <a:endParaRPr lang="ko-KR" altLang="en-US"/>
+          </a:p>
+        </p:txBody>
+      </p:sp>
+      <p:sp>
+        <p:nvSpPr>
+          <p:cNvPr id="5" name="슬라이드 노트 개체 틀 4"/>
+          <p:cNvSpPr>
+            <a:spLocks noGrp="1"/>
+          </p:cNvSpPr>
+          <p:nvPr>
+            <p:ph type="body" sz="quarter" idx="3"/>
+          </p:nvPr>
+        </p:nvSpPr>
+        <p:spPr>
+          <a:xfrm>
+            <a:off x="685800" y="4400550"/>
+            <a:ext cx="5486400" cy="3600450"/>
+          </a:xfrm>
+          <a:prstGeom prst="rect">
+            <a:avLst/>
+          </a:prstGeom>
+        </p:spPr>
+        <p:txBody>
+          <a:bodyPr vert="horz" lIns="91440" tIns="45720" rIns="91440" bIns="45720" rtlCol="0"/>
+          <a:lstStyle/>
+          <a:p>
+            <a:pPr lvl="0"/>
+            <a:r>
+              <a:rPr kumimoji="1" lang="ko-KR" altLang="en-US"/>
+              <a:t>마스터 텍스트 스타일을 편집하려면 클릭</a:t>
+            </a:r>
+          </a:p>
+          <a:p>
+            <a:pPr lvl="1"/>
+            <a:r>
+              <a:rPr kumimoji="1" lang="ko-KR" altLang="en-US"/>
+              <a:t>두 번째 수준</a:t>
+            </a:r>
+          </a:p>
+          <a:p>
+            <a:pPr lvl="2"/>
+            <a:r>
+              <a:rPr kumimoji="1" lang="ko-KR" altLang="en-US"/>
+              <a:t>세 번째 수준</a:t>
+            </a:r>
+          </a:p>
+          <a:p>
+            <a:pPr lvl="3"/>
+            <a:r>
+              <a:rPr kumimoji="1" lang="ko-KR" altLang="en-US"/>
+              <a:t>네 번째 수준</a:t>
+            </a:r>
+          </a:p>
+          <a:p>
+            <a:pPr lvl="4"/>
+            <a:r>
+              <a:rPr kumimoji="1" lang="ko-KR" altLang="en-US"/>
+              <a:t>다섯 번째 수준</a:t>
+            </a:r>
+          </a:p>
+        </p:txBody>
+      </p:sp>
+      <p:sp>
+        <p:nvSpPr>
+          <p:cNvPr id="6" name="바닥글 개체 틀 5"/>
+          <p:cNvSpPr>
+            <a:spLocks noGrp="1"/>
+          </p:cNvSpPr>
+          <p:nvPr>
+            <p:ph type="ftr" sz="quarter" idx="4"/>
+          </p:nvPr>
+        </p:nvSpPr>
+        <p:spPr>
+          <a:xfrm>
+            <a:off x="0" y="8685213"/>
+            <a:ext cx="2971800" cy="458787"/>
+          </a:xfrm>
+          <a:prstGeom prst="rect">
+            <a:avLst/>
+          </a:prstGeom>
+        </p:spPr>
+        <p:txBody>
+          <a:bodyPr vert="horz" lIns="91440" tIns="45720" rIns="91440" bIns="45720" rtlCol="0" anchor="b"/>
+          <a:lstStyle>
+            <a:lvl1pPr algn="l">
+              <a:defRPr sz="1200"/>
+            </a:lvl1pPr>
+          </a:lstStyle>
+          <a:p>
+            <a:endParaRPr kumimoji="1" lang="ko-KR" altLang="en-US"/>
+          </a:p>
+        </p:txBody>
+      </p:sp>
+      <p:sp>
+        <p:nvSpPr>
+          <p:cNvPr id="7" name="슬라이드 번호 개체 틀 6"/>
+          <p:cNvSpPr>
+            <a:spLocks noGrp="1"/>
+          </p:cNvSpPr>
+          <p:nvPr>
+            <p:ph type="sldNum" sz="quarter" idx="5"/>
+          </p:nvPr>
+        </p:nvSpPr>
+        <p:spPr>
+          <a:xfrm>
+            <a:off x="3884613" y="8685213"/>
+            <a:ext cx="2971800" cy="458787"/>
+          </a:xfrm>
+          <a:prstGeom prst="rect">
+            <a:avLst/>
+          </a:prstGeom>
+        </p:spPr>
+        <p:txBody>
+          <a:bodyPr vert="horz" lIns="91440" tIns="45720" rIns="91440" bIns="45720" rtlCol="0" anchor="b"/>
+          <a:lstStyle>
+            <a:lvl1pPr algn="r">
+              <a:defRPr sz="1200"/>
+            </a:lvl1pPr>
+          </a:lstStyle>
+          <a:p>
+            <a:fld id="{020A3022-3395-C343-B6A4-57C12CCF3231}" type="slidenum">
+              <a:rPr kumimoji="1" lang="ko-KR" altLang="en-US" smtClean="0"/>
+              <a:t>‹#›</a:t>
+            </a:fld>
+            <a:endParaRPr kumimoji="1" lang="ko-KR" altLang="en-US"/>
+          </a:p>
+        </p:txBody>
+      </p:sp>
+    </p:spTree>
+    <p:extLst>
+      <p:ext uri="{BB962C8B-B14F-4D97-AF65-F5344CB8AC3E}">
+        <p14:creationId xmlns:p14="http://schemas.microsoft.com/office/powerpoint/2010/main" val="2394784695"/>
+      </p:ext>
+    </p:extLst>
+  </p:cSld>
+  <p:clrMap bg1="lt1" tx1="dk1" bg2="lt2" tx2="dk2" accent1="accent1" accent2="accent2" accent3="accent3" accent4="accent4" accent5="accent5" accent6="accent6" hlink="hlink" folHlink="folHlink"/>
+  <p:notesStyle>
+    <a:lvl1pPr marL="0" algn="l" defTabSz="914400" rtl="0" eaLnBrk="1" latinLnBrk="1" hangingPunct="1">
+      <a:defRPr sz="1200" kern="1200">
+        <a:solidFill>
+          <a:schemeClr val="tx1"/>
+        </a:solidFill>
+        <a:latin typeface="+mn-lt"/>
+        <a:ea typeface="+mn-ea"/>
+        <a:cs typeface="+mn-cs"/>
+      </a:defRPr>
+    </a:lvl1pPr>
+    <a:lvl2pPr marL="457200" algn="l" defTabSz="914400" rtl="0" eaLnBrk="1" latinLnBrk="1" hangingPunct="1">
+      <a:defRPr sz="1200" kern="1200">
+        <a:solidFill>
+          <a:schemeClr val="tx1"/>
+        </a:solidFill>
+        <a:latin typeface="+mn-lt"/>
+        <a:ea typeface="+mn-ea"/>
+        <a:cs typeface="+mn-cs"/>
+      </a:defRPr>
+    </a:lvl2pPr>
+    <a:lvl3pPr marL="914400" algn="l" defTabSz="914400" rtl="0" eaLnBrk="1" latinLnBrk="1" hangingPunct="1">
+      <a:defRPr sz="1200" kern="1200">
+        <a:solidFill>
+          <a:schemeClr val="tx1"/>
+        </a:solidFill>
+        <a:latin typeface="+mn-lt"/>
+        <a:ea typeface="+mn-ea"/>
+        <a:cs typeface="+mn-cs"/>
+      </a:defRPr>
+    </a:lvl3pPr>
+    <a:lvl4pPr marL="1371600" algn="l" defTabSz="914400" rtl="0" eaLnBrk="1" latinLnBrk="1" hangingPunct="1">
+      <a:defRPr sz="1200" kern="1200">
+        <a:solidFill>
+          <a:schemeClr val="tx1"/>
+        </a:solidFill>
+        <a:latin typeface="+mn-lt"/>
+        <a:ea typeface="+mn-ea"/>
+        <a:cs typeface="+mn-cs"/>
+      </a:defRPr>
+    </a:lvl4pPr>
+    <a:lvl5pPr marL="1828800" algn="l" defTabSz="914400" rtl="0" eaLnBrk="1" latinLnBrk="1" hangingPunct="1">
+      <a:defRPr sz="1200" kern="1200">
+        <a:solidFill>
+          <a:schemeClr val="tx1"/>
+        </a:solidFill>
+        <a:latin typeface="+mn-lt"/>
+        <a:ea typeface="+mn-ea"/>
+        <a:cs typeface="+mn-cs"/>
+      </a:defRPr>
+    </a:lvl5pPr>
+    <a:lvl6pPr marL="2286000" algn="l" defTabSz="914400" rtl="0" eaLnBrk="1" latinLnBrk="1" hangingPunct="1">
+      <a:defRPr sz="1200" kern="1200">
+        <a:solidFill>
+          <a:schemeClr val="tx1"/>
+        </a:solidFill>
+        <a:latin typeface="+mn-lt"/>
+        <a:ea typeface="+mn-ea"/>
+        <a:cs typeface="+mn-cs"/>
+      </a:defRPr>
+    </a:lvl6pPr>
+    <a:lvl7pPr marL="2743200" algn="l" defTabSz="914400" rtl="0" eaLnBrk="1" latinLnBrk="1" hangingPunct="1">
+      <a:defRPr sz="1200" kern="1200">
+        <a:solidFill>
+          <a:schemeClr val="tx1"/>
+        </a:solidFill>
+        <a:latin typeface="+mn-lt"/>
+        <a:ea typeface="+mn-ea"/>
+        <a:cs typeface="+mn-cs"/>
+      </a:defRPr>
+    </a:lvl7pPr>
+    <a:lvl8pPr marL="3200400" algn="l" defTabSz="914400" rtl="0" eaLnBrk="1" latinLnBrk="1" hangingPunct="1">
+      <a:defRPr sz="1200" kern="1200">
+        <a:solidFill>
+          <a:schemeClr val="tx1"/>
+        </a:solidFill>
+        <a:latin typeface="+mn-lt"/>
+        <a:ea typeface="+mn-ea"/>
+        <a:cs typeface="+mn-cs"/>
+      </a:defRPr>
+    </a:lvl8pPr>
+    <a:lvl9pPr marL="3657600" algn="l" defTabSz="914400" rtl="0" eaLnBrk="1" latinLnBrk="1" hangingPunct="1">
+      <a:defRPr sz="1200" kern="1200">
+        <a:solidFill>
+          <a:schemeClr val="tx1"/>
+        </a:solidFill>
+        <a:latin typeface="+mn-lt"/>
+        <a:ea typeface="+mn-ea"/>
+        <a:cs typeface="+mn-cs"/>
+      </a:defRPr>
+    </a:lvl9pPr>
+  </p:notesStyle>
+</p:notesMaster>
+</file>
+
+<file path=ppt/notesSlides/notesSlide1.xml><?xml version="1.0" encoding="utf-8"?>
+<p:notes xmlns:a="http://schemas.openxmlformats.org/drawingml/2006/main" xmlns:r="http://schemas.openxmlformats.org/officeDocument/2006/relationships" xmlns:p="http://schemas.openxmlformats.org/presentationml/2006/main">
+  <p:cSld>
+    <p:spTree>
+      <p:nvGrpSpPr>
+        <p:cNvPr id="1" name=""/>
+        <p:cNvGrpSpPr/>
+        <p:nvPr/>
+      </p:nvGrpSpPr>
+      <p:grpSpPr>
+        <a:xfrm>
+          <a:off x="0" y="0"/>
+          <a:ext cx="0" cy="0"/>
+          <a:chOff x="0" y="0"/>
+          <a:chExt cx="0" cy="0"/>
+        </a:xfrm>
+      </p:grpSpPr>
+      <p:sp>
+        <p:nvSpPr>
+          <p:cNvPr id="2" name="슬라이드 이미지 개체 틀 1"/>
+          <p:cNvSpPr>
+            <a:spLocks noGrp="1" noRot="1" noChangeAspect="1"/>
+          </p:cNvSpPr>
+          <p:nvPr>
+            <p:ph type="sldImg"/>
+          </p:nvPr>
+        </p:nvSpPr>
+        <p:spPr/>
+      </p:sp>
+      <p:sp>
+        <p:nvSpPr>
+          <p:cNvPr id="3" name="슬라이드 노트 개체 틀 2"/>
+          <p:cNvSpPr>
+            <a:spLocks noGrp="1"/>
+          </p:cNvSpPr>
+          <p:nvPr>
+            <p:ph type="body" idx="1"/>
+          </p:nvPr>
+        </p:nvSpPr>
+        <p:spPr/>
+        <p:txBody>
+          <a:bodyPr/>
+          <a:lstStyle/>
+          <a:p>
+            <a:r>
+              <a:rPr kumimoji="1" lang="en" altLang="ko-KR" dirty="0"/>
+              <a:t>241101_samsung.jpg</a:t>
+            </a:r>
+            <a:endParaRPr kumimoji="1" lang="ko-KR" altLang="en-US" dirty="0"/>
+          </a:p>
+        </p:txBody>
+      </p:sp>
+      <p:sp>
+        <p:nvSpPr>
+          <p:cNvPr id="4" name="슬라이드 번호 개체 틀 3"/>
+          <p:cNvSpPr>
+            <a:spLocks noGrp="1"/>
+          </p:cNvSpPr>
+          <p:nvPr>
+            <p:ph type="sldNum" sz="quarter" idx="5"/>
+          </p:nvPr>
+        </p:nvSpPr>
+        <p:spPr/>
+        <p:txBody>
+          <a:bodyPr/>
+          <a:lstStyle/>
+          <a:p>
+            <a:fld id="{020A3022-3395-C343-B6A4-57C12CCF3231}" type="slidenum">
+              <a:rPr kumimoji="1" lang="ko-KR" altLang="en-US" smtClean="0"/>
+              <a:t>2</a:t>
+            </a:fld>
+            <a:endParaRPr kumimoji="1" lang="ko-KR" altLang="en-US"/>
+          </a:p>
+        </p:txBody>
+      </p:sp>
+    </p:spTree>
+    <p:extLst>
+      <p:ext uri="{BB962C8B-B14F-4D97-AF65-F5344CB8AC3E}">
+        <p14:creationId xmlns:p14="http://schemas.microsoft.com/office/powerpoint/2010/main" val="4025757304"/>
+      </p:ext>
+    </p:extLst>
+  </p:cSld>
+  <p:clrMapOvr>
+    <a:masterClrMapping/>
+  </p:clrMapOvr>
+</p:notes>
+</file>
+
 <file path=ppt/slideLayouts/slideLayout1.xml><?xml version="1.0" encoding="utf-8"?>
 <p:sldLayout xmlns:a="http://schemas.openxmlformats.org/drawingml/2006/main" xmlns:r="http://schemas.openxmlformats.org/officeDocument/2006/relationships" xmlns:p="http://schemas.openxmlformats.org/presentationml/2006/main" type="title" preserve="1">
   <p:cSld name="제목 슬라이드">
@@ -276,7 +716,7 @@
           <a:p>
             <a:fld id="{139ACF50-0E1E-CF4A-B6AC-5CB0F4ED89A6}" type="datetimeFigureOut">
               <a:rPr kumimoji="1" lang="ko-KR" altLang="en-US" smtClean="0"/>
-              <a:t>2024. 10. 26.</a:t>
+              <a:t>2024. 11. 11.</a:t>
             </a:fld>
             <a:endParaRPr kumimoji="1" lang="ko-KR" altLang="en-US"/>
           </a:p>
@@ -474,7 +914,7 @@
           <a:p>
             <a:fld id="{139ACF50-0E1E-CF4A-B6AC-5CB0F4ED89A6}" type="datetimeFigureOut">
               <a:rPr kumimoji="1" lang="ko-KR" altLang="en-US" smtClean="0"/>
-              <a:t>2024. 10. 26.</a:t>
+              <a:t>2024. 11. 11.</a:t>
             </a:fld>
             <a:endParaRPr kumimoji="1" lang="ko-KR" altLang="en-US"/>
           </a:p>
@@ -682,7 +1122,7 @@
           <a:p>
             <a:fld id="{139ACF50-0E1E-CF4A-B6AC-5CB0F4ED89A6}" type="datetimeFigureOut">
               <a:rPr kumimoji="1" lang="ko-KR" altLang="en-US" smtClean="0"/>
-              <a:t>2024. 10. 26.</a:t>
+              <a:t>2024. 11. 11.</a:t>
             </a:fld>
             <a:endParaRPr kumimoji="1" lang="ko-KR" altLang="en-US"/>
           </a:p>
@@ -880,7 +1320,7 @@
           <a:p>
             <a:fld id="{139ACF50-0E1E-CF4A-B6AC-5CB0F4ED89A6}" type="datetimeFigureOut">
               <a:rPr kumimoji="1" lang="ko-KR" altLang="en-US" smtClean="0"/>
-              <a:t>2024. 10. 26.</a:t>
+              <a:t>2024. 11. 11.</a:t>
             </a:fld>
             <a:endParaRPr kumimoji="1" lang="ko-KR" altLang="en-US"/>
           </a:p>
@@ -1155,7 +1595,7 @@
           <a:p>
             <a:fld id="{139ACF50-0E1E-CF4A-B6AC-5CB0F4ED89A6}" type="datetimeFigureOut">
               <a:rPr kumimoji="1" lang="ko-KR" altLang="en-US" smtClean="0"/>
-              <a:t>2024. 10. 26.</a:t>
+              <a:t>2024. 11. 11.</a:t>
             </a:fld>
             <a:endParaRPr kumimoji="1" lang="ko-KR" altLang="en-US"/>
           </a:p>
@@ -1420,7 +1860,7 @@
           <a:p>
             <a:fld id="{139ACF50-0E1E-CF4A-B6AC-5CB0F4ED89A6}" type="datetimeFigureOut">
               <a:rPr kumimoji="1" lang="ko-KR" altLang="en-US" smtClean="0"/>
-              <a:t>2024. 10. 26.</a:t>
+              <a:t>2024. 11. 11.</a:t>
             </a:fld>
             <a:endParaRPr kumimoji="1" lang="ko-KR" altLang="en-US"/>
           </a:p>
@@ -1832,7 +2272,7 @@
           <a:p>
             <a:fld id="{139ACF50-0E1E-CF4A-B6AC-5CB0F4ED89A6}" type="datetimeFigureOut">
               <a:rPr kumimoji="1" lang="ko-KR" altLang="en-US" smtClean="0"/>
-              <a:t>2024. 10. 26.</a:t>
+              <a:t>2024. 11. 11.</a:t>
             </a:fld>
             <a:endParaRPr kumimoji="1" lang="ko-KR" altLang="en-US"/>
           </a:p>
@@ -1973,7 +2413,7 @@
           <a:p>
             <a:fld id="{139ACF50-0E1E-CF4A-B6AC-5CB0F4ED89A6}" type="datetimeFigureOut">
               <a:rPr kumimoji="1" lang="ko-KR" altLang="en-US" smtClean="0"/>
-              <a:t>2024. 10. 26.</a:t>
+              <a:t>2024. 11. 11.</a:t>
             </a:fld>
             <a:endParaRPr kumimoji="1" lang="ko-KR" altLang="en-US"/>
           </a:p>
@@ -2086,7 +2526,7 @@
           <a:p>
             <a:fld id="{139ACF50-0E1E-CF4A-B6AC-5CB0F4ED89A6}" type="datetimeFigureOut">
               <a:rPr kumimoji="1" lang="ko-KR" altLang="en-US" smtClean="0"/>
-              <a:t>2024. 10. 26.</a:t>
+              <a:t>2024. 11. 11.</a:t>
             </a:fld>
             <a:endParaRPr kumimoji="1" lang="ko-KR" altLang="en-US"/>
           </a:p>
@@ -2397,7 +2837,7 @@
           <a:p>
             <a:fld id="{139ACF50-0E1E-CF4A-B6AC-5CB0F4ED89A6}" type="datetimeFigureOut">
               <a:rPr kumimoji="1" lang="ko-KR" altLang="en-US" smtClean="0"/>
-              <a:t>2024. 10. 26.</a:t>
+              <a:t>2024. 11. 11.</a:t>
             </a:fld>
             <a:endParaRPr kumimoji="1" lang="ko-KR" altLang="en-US"/>
           </a:p>
@@ -2685,7 +3125,7 @@
           <a:p>
             <a:fld id="{139ACF50-0E1E-CF4A-B6AC-5CB0F4ED89A6}" type="datetimeFigureOut">
               <a:rPr kumimoji="1" lang="ko-KR" altLang="en-US" smtClean="0"/>
-              <a:t>2024. 10. 26.</a:t>
+              <a:t>2024. 11. 11.</a:t>
             </a:fld>
             <a:endParaRPr kumimoji="1" lang="ko-KR" altLang="en-US"/>
           </a:p>
@@ -2926,7 +3366,7 @@
           <a:p>
             <a:fld id="{139ACF50-0E1E-CF4A-B6AC-5CB0F4ED89A6}" type="datetimeFigureOut">
               <a:rPr kumimoji="1" lang="ko-KR" altLang="en-US" smtClean="0"/>
-              <a:t>2024. 10. 26.</a:t>
+              <a:t>2024. 11. 11.</a:t>
             </a:fld>
             <a:endParaRPr kumimoji="1" lang="ko-KR" altLang="en-US"/>
           </a:p>
@@ -3852,6 +4292,771 @@
           <a:chExt cx="0" cy="0"/>
         </a:xfrm>
       </p:grpSpPr>
+      <p:pic>
+        <p:nvPicPr>
+          <p:cNvPr id="2" name="Picture 2">
+            <a:extLst>
+              <a:ext uri="{FF2B5EF4-FFF2-40B4-BE49-F238E27FC236}">
+                <a16:creationId xmlns:a16="http://schemas.microsoft.com/office/drawing/2014/main" id="{E5D7D4C6-7444-AE72-9FD0-F660FAEFCEF8}"/>
+              </a:ext>
+            </a:extLst>
+          </p:cNvPr>
+          <p:cNvPicPr>
+            <a:picLocks noChangeAspect="1" noChangeArrowheads="1"/>
+          </p:cNvPicPr>
+          <p:nvPr/>
+        </p:nvPicPr>
+        <p:blipFill>
+          <a:blip r:embed="rId3">
+            <a:extLst>
+              <a:ext uri="{28A0092B-C50C-407E-A947-70E740481C1C}">
+                <a14:useLocalDpi xmlns:a14="http://schemas.microsoft.com/office/drawing/2010/main" val="0"/>
+              </a:ext>
+            </a:extLst>
+          </a:blip>
+          <a:srcRect/>
+          <a:stretch>
+            <a:fillRect/>
+          </a:stretch>
+        </p:blipFill>
+        <p:spPr bwMode="auto">
+          <a:xfrm>
+            <a:off x="-4115671" y="-4182846"/>
+            <a:ext cx="7620000" cy="4000500"/>
+          </a:xfrm>
+          <a:prstGeom prst="rect">
+            <a:avLst/>
+          </a:prstGeom>
+          <a:noFill/>
+          <a:extLst>
+            <a:ext uri="{909E8E84-426E-40DD-AFC4-6F175D3DCCD1}">
+              <a14:hiddenFill xmlns:a14="http://schemas.microsoft.com/office/drawing/2010/main">
+                <a:solidFill>
+                  <a:srgbClr val="FFFFFF"/>
+                </a:solidFill>
+              </a14:hiddenFill>
+            </a:ext>
+          </a:extLst>
+        </p:spPr>
+      </p:pic>
+      <p:sp>
+        <p:nvSpPr>
+          <p:cNvPr id="3" name="모서리가 둥근 직사각형 2">
+            <a:extLst>
+              <a:ext uri="{FF2B5EF4-FFF2-40B4-BE49-F238E27FC236}">
+                <a16:creationId xmlns:a16="http://schemas.microsoft.com/office/drawing/2014/main" id="{185DA787-7AEE-6E05-3035-B9A16F16CC41}"/>
+              </a:ext>
+            </a:extLst>
+          </p:cNvPr>
+          <p:cNvSpPr/>
+          <p:nvPr/>
+        </p:nvSpPr>
+        <p:spPr>
+          <a:xfrm>
+            <a:off x="945931" y="923446"/>
+            <a:ext cx="9669517" cy="1912883"/>
+          </a:xfrm>
+          <a:prstGeom prst="roundRect">
+            <a:avLst>
+              <a:gd name="adj" fmla="val 4579"/>
+            </a:avLst>
+          </a:prstGeom>
+          <a:solidFill>
+            <a:srgbClr val="081740"/>
+          </a:solidFill>
+          <a:ln w="6350">
+            <a:solidFill>
+              <a:schemeClr val="bg1">
+                <a:lumMod val="75000"/>
+              </a:schemeClr>
+            </a:solidFill>
+          </a:ln>
+        </p:spPr>
+        <p:style>
+          <a:lnRef idx="2">
+            <a:schemeClr val="accent1">
+              <a:shade val="15000"/>
+            </a:schemeClr>
+          </a:lnRef>
+          <a:fillRef idx="1">
+            <a:schemeClr val="accent1"/>
+          </a:fillRef>
+          <a:effectRef idx="0">
+            <a:schemeClr val="accent1"/>
+          </a:effectRef>
+          <a:fontRef idx="minor">
+            <a:schemeClr val="lt1"/>
+          </a:fontRef>
+        </p:style>
+        <p:txBody>
+          <a:bodyPr rtlCol="0" anchor="ctr"/>
+          <a:lstStyle/>
+          <a:p>
+            <a:pPr algn="ctr"/>
+            <a:endParaRPr kumimoji="1" lang="ko-KR" altLang="en-US" dirty="0"/>
+          </a:p>
+        </p:txBody>
+      </p:sp>
+      <p:sp>
+        <p:nvSpPr>
+          <p:cNvPr id="5" name="TextBox 4">
+            <a:extLst>
+              <a:ext uri="{FF2B5EF4-FFF2-40B4-BE49-F238E27FC236}">
+                <a16:creationId xmlns:a16="http://schemas.microsoft.com/office/drawing/2014/main" id="{AD03C10D-B957-0D4E-C758-055B55A6E584}"/>
+              </a:ext>
+            </a:extLst>
+          </p:cNvPr>
+          <p:cNvSpPr txBox="1"/>
+          <p:nvPr/>
+        </p:nvSpPr>
+        <p:spPr>
+          <a:xfrm>
+            <a:off x="1373072" y="1942181"/>
+            <a:ext cx="2922595" cy="369332"/>
+          </a:xfrm>
+          <a:prstGeom prst="rect">
+            <a:avLst/>
+          </a:prstGeom>
+          <a:noFill/>
+        </p:spPr>
+        <p:txBody>
+          <a:bodyPr wrap="none" rtlCol="0">
+            <a:spAutoFit/>
+          </a:bodyPr>
+          <a:lstStyle/>
+          <a:p>
+            <a:r>
+              <a:rPr lang="ko-KR" altLang="en-US" b="1" dirty="0">
+                <a:solidFill>
+                  <a:srgbClr val="E8E8E8"/>
+                </a:solidFill>
+                <a:highlight>
+                  <a:srgbClr val="121212"/>
+                </a:highlight>
+                <a:latin typeface="Pretendard" panose="02000503000000020004" pitchFamily="2" charset="-127"/>
+                <a:ea typeface="Pretendard" panose="02000503000000020004" pitchFamily="2" charset="-127"/>
+              </a:rPr>
+              <a:t>접수</a:t>
+            </a:r>
+            <a:r>
+              <a:rPr lang="en-US" altLang="ko-KR" b="1" dirty="0">
+                <a:solidFill>
+                  <a:srgbClr val="E8E8E8"/>
+                </a:solidFill>
+                <a:highlight>
+                  <a:srgbClr val="121212"/>
+                </a:highlight>
+                <a:latin typeface="Pretendard" panose="02000503000000020004" pitchFamily="2" charset="-127"/>
+                <a:ea typeface="Pretendard" panose="02000503000000020004" pitchFamily="2" charset="-127"/>
+              </a:rPr>
+              <a:t>:</a:t>
+            </a:r>
+            <a:r>
+              <a:rPr lang="ko-KR" altLang="en-US" b="1" dirty="0">
+                <a:solidFill>
+                  <a:srgbClr val="E8E8E8"/>
+                </a:solidFill>
+                <a:highlight>
+                  <a:srgbClr val="121212"/>
+                </a:highlight>
+                <a:latin typeface="Pretendard" panose="02000503000000020004" pitchFamily="2" charset="-127"/>
+                <a:ea typeface="Pretendard" panose="02000503000000020004" pitchFamily="2" charset="-127"/>
+              </a:rPr>
+              <a:t> </a:t>
+            </a:r>
+            <a:r>
+              <a:rPr lang="en-US" altLang="ko-KR" b="1" dirty="0">
+                <a:solidFill>
+                  <a:srgbClr val="E8E8E8"/>
+                </a:solidFill>
+                <a:highlight>
+                  <a:srgbClr val="121212"/>
+                </a:highlight>
+                <a:latin typeface="Pretendard" panose="02000503000000020004" pitchFamily="2" charset="-127"/>
+                <a:ea typeface="Pretendard" panose="02000503000000020004" pitchFamily="2" charset="-127"/>
+              </a:rPr>
+              <a:t>10.</a:t>
+            </a:r>
+            <a:r>
+              <a:rPr lang="ko-KR" altLang="en-US" b="1" dirty="0">
+                <a:solidFill>
+                  <a:srgbClr val="E8E8E8"/>
+                </a:solidFill>
+                <a:highlight>
+                  <a:srgbClr val="121212"/>
+                </a:highlight>
+                <a:latin typeface="Pretendard" panose="02000503000000020004" pitchFamily="2" charset="-127"/>
+                <a:ea typeface="Pretendard" panose="02000503000000020004" pitchFamily="2" charset="-127"/>
+              </a:rPr>
+              <a:t> </a:t>
+            </a:r>
+            <a:r>
+              <a:rPr lang="en-US" altLang="ko-KR" b="1" dirty="0">
+                <a:solidFill>
+                  <a:srgbClr val="E8E8E8"/>
+                </a:solidFill>
+                <a:highlight>
+                  <a:srgbClr val="121212"/>
+                </a:highlight>
+                <a:latin typeface="Pretendard" panose="02000503000000020004" pitchFamily="2" charset="-127"/>
+                <a:ea typeface="Pretendard" panose="02000503000000020004" pitchFamily="2" charset="-127"/>
+              </a:rPr>
+              <a:t>21</a:t>
+            </a:r>
+            <a:r>
+              <a:rPr lang="en-US" altLang="ko-KR" b="1" i="0" dirty="0">
+                <a:solidFill>
+                  <a:srgbClr val="E8E8E8"/>
+                </a:solidFill>
+                <a:effectLst/>
+                <a:highlight>
+                  <a:srgbClr val="121212"/>
+                </a:highlight>
+                <a:latin typeface="Pretendard" panose="02000503000000020004" pitchFamily="2" charset="-127"/>
+                <a:ea typeface="Pretendard" panose="02000503000000020004" pitchFamily="2" charset="-127"/>
+              </a:rPr>
+              <a:t>(</a:t>
+            </a:r>
+            <a:r>
+              <a:rPr lang="ko-KR" altLang="en-US" b="1" i="0" dirty="0">
+                <a:solidFill>
+                  <a:srgbClr val="E8E8E8"/>
+                </a:solidFill>
+                <a:effectLst/>
+                <a:highlight>
+                  <a:srgbClr val="121212"/>
+                </a:highlight>
+                <a:latin typeface="Pretendard" panose="02000503000000020004" pitchFamily="2" charset="-127"/>
+                <a:ea typeface="Pretendard" panose="02000503000000020004" pitchFamily="2" charset="-127"/>
+              </a:rPr>
+              <a:t>월</a:t>
+            </a:r>
+            <a:r>
+              <a:rPr lang="en-US" altLang="ko-KR" b="1" i="0" dirty="0">
+                <a:solidFill>
+                  <a:srgbClr val="E8E8E8"/>
+                </a:solidFill>
+                <a:effectLst/>
+                <a:highlight>
+                  <a:srgbClr val="121212"/>
+                </a:highlight>
+                <a:latin typeface="Pretendard" panose="02000503000000020004" pitchFamily="2" charset="-127"/>
+                <a:ea typeface="Pretendard" panose="02000503000000020004" pitchFamily="2" charset="-127"/>
+              </a:rPr>
+              <a:t>) </a:t>
+            </a:r>
+            <a:r>
+              <a:rPr lang="en" altLang="ko-KR" b="1" i="0" dirty="0">
+                <a:solidFill>
+                  <a:srgbClr val="E8E8E8"/>
+                </a:solidFill>
+                <a:effectLst/>
+                <a:highlight>
+                  <a:srgbClr val="121212"/>
+                </a:highlight>
+                <a:latin typeface="Pretendard" panose="02000503000000020004" pitchFamily="2" charset="-127"/>
+                <a:ea typeface="Pretendard" panose="02000503000000020004" pitchFamily="2" charset="-127"/>
+              </a:rPr>
+              <a:t>– 11. 22(</a:t>
+            </a:r>
+            <a:r>
+              <a:rPr lang="ko-KR" altLang="en-US" b="1" i="0" dirty="0">
+                <a:solidFill>
+                  <a:srgbClr val="E8E8E8"/>
+                </a:solidFill>
+                <a:effectLst/>
+                <a:highlight>
+                  <a:srgbClr val="121212"/>
+                </a:highlight>
+                <a:latin typeface="Pretendard" panose="02000503000000020004" pitchFamily="2" charset="-127"/>
+                <a:ea typeface="Pretendard" panose="02000503000000020004" pitchFamily="2" charset="-127"/>
+              </a:rPr>
+              <a:t>화</a:t>
+            </a:r>
+            <a:r>
+              <a:rPr lang="en-US" altLang="ko-KR" b="1" i="0" dirty="0">
+                <a:solidFill>
+                  <a:srgbClr val="E8E8E8"/>
+                </a:solidFill>
+                <a:effectLst/>
+                <a:highlight>
+                  <a:srgbClr val="121212"/>
+                </a:highlight>
+                <a:latin typeface="Pretendard" panose="02000503000000020004" pitchFamily="2" charset="-127"/>
+                <a:ea typeface="Pretendard" panose="02000503000000020004" pitchFamily="2" charset="-127"/>
+              </a:rPr>
+              <a:t>)</a:t>
+            </a:r>
+            <a:endParaRPr lang="en" altLang="ko-KR" b="1" i="0" dirty="0">
+              <a:solidFill>
+                <a:srgbClr val="E8E8E8"/>
+              </a:solidFill>
+              <a:effectLst/>
+              <a:highlight>
+                <a:srgbClr val="121212"/>
+              </a:highlight>
+              <a:latin typeface="Pretendard" panose="02000503000000020004" pitchFamily="2" charset="-127"/>
+              <a:ea typeface="Pretendard" panose="02000503000000020004" pitchFamily="2" charset="-127"/>
+            </a:endParaRPr>
+          </a:p>
+        </p:txBody>
+      </p:sp>
+      <p:sp>
+        <p:nvSpPr>
+          <p:cNvPr id="7" name="TextBox 6">
+            <a:extLst>
+              <a:ext uri="{FF2B5EF4-FFF2-40B4-BE49-F238E27FC236}">
+                <a16:creationId xmlns:a16="http://schemas.microsoft.com/office/drawing/2014/main" id="{4787CE47-DEA7-5357-BD43-EB8872C45E6F}"/>
+              </a:ext>
+            </a:extLst>
+          </p:cNvPr>
+          <p:cNvSpPr txBox="1"/>
+          <p:nvPr/>
+        </p:nvSpPr>
+        <p:spPr>
+          <a:xfrm>
+            <a:off x="1373072" y="1355072"/>
+            <a:ext cx="8815234" cy="584775"/>
+          </a:xfrm>
+          <a:prstGeom prst="rect">
+            <a:avLst/>
+          </a:prstGeom>
+          <a:noFill/>
+        </p:spPr>
+        <p:txBody>
+          <a:bodyPr wrap="none" rtlCol="0">
+            <a:spAutoFit/>
+          </a:bodyPr>
+          <a:lstStyle/>
+          <a:p>
+            <a:r>
+              <a:rPr kumimoji="1" lang="en-US" altLang="ko-KR" sz="3200" b="1" dirty="0">
+                <a:solidFill>
+                  <a:srgbClr val="E8E8E8"/>
+                </a:solidFill>
+                <a:highlight>
+                  <a:srgbClr val="121212"/>
+                </a:highlight>
+                <a:latin typeface="Pretendard" panose="02000503000000020004" pitchFamily="2" charset="-127"/>
+                <a:ea typeface="Pretendard" panose="02000503000000020004" pitchFamily="2" charset="-127"/>
+              </a:rPr>
+              <a:t>Samsung Developer Conference Korea 2024</a:t>
+            </a:r>
+            <a:endParaRPr kumimoji="1" lang="ko-KR" altLang="en-US" sz="3200" dirty="0"/>
+          </a:p>
+        </p:txBody>
+      </p:sp>
+      <p:pic>
+        <p:nvPicPr>
+          <p:cNvPr id="14" name="그림 13" descr="텍스트, 폰트, 스크린샷, 로고이(가) 표시된 사진&#10;&#10;자동 생성된 설명">
+            <a:extLst>
+              <a:ext uri="{FF2B5EF4-FFF2-40B4-BE49-F238E27FC236}">
+                <a16:creationId xmlns:a16="http://schemas.microsoft.com/office/drawing/2014/main" id="{EB7CDC19-0274-1A7C-FB32-3165E0A50494}"/>
+              </a:ext>
+            </a:extLst>
+          </p:cNvPr>
+          <p:cNvPicPr>
+            <a:picLocks noChangeAspect="1"/>
+          </p:cNvPicPr>
+          <p:nvPr/>
+        </p:nvPicPr>
+        <p:blipFill>
+          <a:blip r:embed="rId4"/>
+          <a:srcRect t="6775" b="8324"/>
+          <a:stretch>
+            <a:fillRect/>
+          </a:stretch>
+        </p:blipFill>
+        <p:spPr>
+          <a:xfrm>
+            <a:off x="945931" y="3429000"/>
+            <a:ext cx="9669517" cy="1912883"/>
+          </a:xfrm>
+          <a:custGeom>
+            <a:avLst/>
+            <a:gdLst>
+              <a:gd name="connsiteX0" fmla="*/ 87591 w 9669517"/>
+              <a:gd name="connsiteY0" fmla="*/ 0 h 1912883"/>
+              <a:gd name="connsiteX1" fmla="*/ 9581926 w 9669517"/>
+              <a:gd name="connsiteY1" fmla="*/ 0 h 1912883"/>
+              <a:gd name="connsiteX2" fmla="*/ 9669517 w 9669517"/>
+              <a:gd name="connsiteY2" fmla="*/ 87591 h 1912883"/>
+              <a:gd name="connsiteX3" fmla="*/ 9669517 w 9669517"/>
+              <a:gd name="connsiteY3" fmla="*/ 1825292 h 1912883"/>
+              <a:gd name="connsiteX4" fmla="*/ 9581926 w 9669517"/>
+              <a:gd name="connsiteY4" fmla="*/ 1912883 h 1912883"/>
+              <a:gd name="connsiteX5" fmla="*/ 87591 w 9669517"/>
+              <a:gd name="connsiteY5" fmla="*/ 1912883 h 1912883"/>
+              <a:gd name="connsiteX6" fmla="*/ 0 w 9669517"/>
+              <a:gd name="connsiteY6" fmla="*/ 1825292 h 1912883"/>
+              <a:gd name="connsiteX7" fmla="*/ 0 w 9669517"/>
+              <a:gd name="connsiteY7" fmla="*/ 87591 h 1912883"/>
+              <a:gd name="connsiteX8" fmla="*/ 87591 w 9669517"/>
+              <a:gd name="connsiteY8" fmla="*/ 0 h 1912883"/>
+            </a:gdLst>
+            <a:ahLst/>
+            <a:cxnLst>
+              <a:cxn ang="0">
+                <a:pos x="connsiteX0" y="connsiteY0"/>
+              </a:cxn>
+              <a:cxn ang="0">
+                <a:pos x="connsiteX1" y="connsiteY1"/>
+              </a:cxn>
+              <a:cxn ang="0">
+                <a:pos x="connsiteX2" y="connsiteY2"/>
+              </a:cxn>
+              <a:cxn ang="0">
+                <a:pos x="connsiteX3" y="connsiteY3"/>
+              </a:cxn>
+              <a:cxn ang="0">
+                <a:pos x="connsiteX4" y="connsiteY4"/>
+              </a:cxn>
+              <a:cxn ang="0">
+                <a:pos x="connsiteX5" y="connsiteY5"/>
+              </a:cxn>
+              <a:cxn ang="0">
+                <a:pos x="connsiteX6" y="connsiteY6"/>
+              </a:cxn>
+              <a:cxn ang="0">
+                <a:pos x="connsiteX7" y="connsiteY7"/>
+              </a:cxn>
+              <a:cxn ang="0">
+                <a:pos x="connsiteX8" y="connsiteY8"/>
+              </a:cxn>
+            </a:cxnLst>
+            <a:rect l="l" t="t" r="r" b="b"/>
+            <a:pathLst>
+              <a:path w="9669517" h="1912883">
+                <a:moveTo>
+                  <a:pt x="87591" y="0"/>
+                </a:moveTo>
+                <a:lnTo>
+                  <a:pt x="9581926" y="0"/>
+                </a:lnTo>
+                <a:cubicBezTo>
+                  <a:pt x="9630301" y="0"/>
+                  <a:pt x="9669517" y="39216"/>
+                  <a:pt x="9669517" y="87591"/>
+                </a:cubicBezTo>
+                <a:lnTo>
+                  <a:pt x="9669517" y="1825292"/>
+                </a:lnTo>
+                <a:cubicBezTo>
+                  <a:pt x="9669517" y="1873667"/>
+                  <a:pt x="9630301" y="1912883"/>
+                  <a:pt x="9581926" y="1912883"/>
+                </a:cubicBezTo>
+                <a:lnTo>
+                  <a:pt x="87591" y="1912883"/>
+                </a:lnTo>
+                <a:cubicBezTo>
+                  <a:pt x="39216" y="1912883"/>
+                  <a:pt x="0" y="1873667"/>
+                  <a:pt x="0" y="1825292"/>
+                </a:cubicBezTo>
+                <a:lnTo>
+                  <a:pt x="0" y="87591"/>
+                </a:lnTo>
+                <a:cubicBezTo>
+                  <a:pt x="0" y="39216"/>
+                  <a:pt x="39216" y="0"/>
+                  <a:pt x="87591" y="0"/>
+                </a:cubicBezTo>
+                <a:close/>
+              </a:path>
+            </a:pathLst>
+          </a:custGeom>
+        </p:spPr>
+      </p:pic>
+      <p:sp>
+        <p:nvSpPr>
+          <p:cNvPr id="15" name="모서리가 둥근 직사각형 14">
+            <a:extLst>
+              <a:ext uri="{FF2B5EF4-FFF2-40B4-BE49-F238E27FC236}">
+                <a16:creationId xmlns:a16="http://schemas.microsoft.com/office/drawing/2014/main" id="{3C55F18D-5BEF-180C-43BB-2398AF29D4B3}"/>
+              </a:ext>
+            </a:extLst>
+          </p:cNvPr>
+          <p:cNvSpPr/>
+          <p:nvPr/>
+        </p:nvSpPr>
+        <p:spPr>
+          <a:xfrm>
+            <a:off x="945931" y="5618720"/>
+            <a:ext cx="9669517" cy="1912883"/>
+          </a:xfrm>
+          <a:prstGeom prst="roundRect">
+            <a:avLst>
+              <a:gd name="adj" fmla="val 4579"/>
+            </a:avLst>
+          </a:prstGeom>
+          <a:solidFill>
+            <a:schemeClr val="bg1"/>
+          </a:solidFill>
+          <a:ln w="6350">
+            <a:solidFill>
+              <a:schemeClr val="bg1">
+                <a:lumMod val="75000"/>
+              </a:schemeClr>
+            </a:solidFill>
+          </a:ln>
+        </p:spPr>
+        <p:style>
+          <a:lnRef idx="2">
+            <a:schemeClr val="accent1">
+              <a:shade val="15000"/>
+            </a:schemeClr>
+          </a:lnRef>
+          <a:fillRef idx="1">
+            <a:schemeClr val="accent1"/>
+          </a:fillRef>
+          <a:effectRef idx="0">
+            <a:schemeClr val="accent1"/>
+          </a:effectRef>
+          <a:fontRef idx="minor">
+            <a:schemeClr val="lt1"/>
+          </a:fontRef>
+        </p:style>
+        <p:txBody>
+          <a:bodyPr rtlCol="0" anchor="ctr"/>
+          <a:lstStyle/>
+          <a:p>
+            <a:pPr algn="ctr"/>
+            <a:endParaRPr kumimoji="1" lang="ko-KR" altLang="en-US" dirty="0"/>
+          </a:p>
+        </p:txBody>
+      </p:sp>
+      <p:sp>
+        <p:nvSpPr>
+          <p:cNvPr id="16" name="TextBox 15">
+            <a:extLst>
+              <a:ext uri="{FF2B5EF4-FFF2-40B4-BE49-F238E27FC236}">
+                <a16:creationId xmlns:a16="http://schemas.microsoft.com/office/drawing/2014/main" id="{6704DD7E-5F8E-E729-2907-ED1B6344C9E2}"/>
+              </a:ext>
+            </a:extLst>
+          </p:cNvPr>
+          <p:cNvSpPr txBox="1"/>
+          <p:nvPr/>
+        </p:nvSpPr>
+        <p:spPr>
+          <a:xfrm>
+            <a:off x="1373072" y="6637455"/>
+            <a:ext cx="3082895" cy="369332"/>
+          </a:xfrm>
+          <a:prstGeom prst="rect">
+            <a:avLst/>
+          </a:prstGeom>
+          <a:noFill/>
+        </p:spPr>
+        <p:txBody>
+          <a:bodyPr wrap="none" rtlCol="0">
+            <a:spAutoFit/>
+          </a:bodyPr>
+          <a:lstStyle/>
+          <a:p>
+            <a:r>
+              <a:rPr lang="ko-KR" altLang="en-US" b="1" dirty="0">
+                <a:latin typeface="Noto Sans KR" panose="020B0200000000000000" pitchFamily="34" charset="-128"/>
+                <a:ea typeface="Noto Sans KR" panose="020B0200000000000000" pitchFamily="34" charset="-128"/>
+              </a:rPr>
+              <a:t>접수</a:t>
+            </a:r>
+            <a:r>
+              <a:rPr lang="en-US" altLang="ko-KR" b="1" dirty="0">
+                <a:latin typeface="Noto Sans KR" panose="020B0200000000000000" pitchFamily="34" charset="-128"/>
+                <a:ea typeface="Noto Sans KR" panose="020B0200000000000000" pitchFamily="34" charset="-128"/>
+              </a:rPr>
+              <a:t>:</a:t>
+            </a:r>
+            <a:r>
+              <a:rPr lang="ko-KR" altLang="en-US" b="1" dirty="0">
+                <a:latin typeface="Noto Sans KR" panose="020B0200000000000000" pitchFamily="34" charset="-128"/>
+                <a:ea typeface="Noto Sans KR" panose="020B0200000000000000" pitchFamily="34" charset="-128"/>
+              </a:rPr>
+              <a:t> </a:t>
+            </a:r>
+            <a:r>
+              <a:rPr lang="en-US" altLang="ko-KR" b="1" dirty="0">
+                <a:latin typeface="Noto Sans KR" panose="020B0200000000000000" pitchFamily="34" charset="-128"/>
+                <a:ea typeface="Noto Sans KR" panose="020B0200000000000000" pitchFamily="34" charset="-128"/>
+              </a:rPr>
+              <a:t>10.</a:t>
+            </a:r>
+            <a:r>
+              <a:rPr lang="ko-KR" altLang="en-US" b="1" dirty="0">
+                <a:latin typeface="Noto Sans KR" panose="020B0200000000000000" pitchFamily="34" charset="-128"/>
+                <a:ea typeface="Noto Sans KR" panose="020B0200000000000000" pitchFamily="34" charset="-128"/>
+              </a:rPr>
+              <a:t> </a:t>
+            </a:r>
+            <a:r>
+              <a:rPr lang="en-US" altLang="ko-KR" b="1" dirty="0">
+                <a:latin typeface="Noto Sans KR" panose="020B0200000000000000" pitchFamily="34" charset="-128"/>
+                <a:ea typeface="Noto Sans KR" panose="020B0200000000000000" pitchFamily="34" charset="-128"/>
+              </a:rPr>
+              <a:t>21</a:t>
+            </a:r>
+            <a:r>
+              <a:rPr lang="en-US" altLang="ko-KR" b="1" dirty="0">
+                <a:effectLst/>
+                <a:latin typeface="Noto Sans KR" panose="020B0200000000000000" pitchFamily="34" charset="-128"/>
+                <a:ea typeface="Noto Sans KR" panose="020B0200000000000000" pitchFamily="34" charset="-128"/>
+              </a:rPr>
+              <a:t>(</a:t>
+            </a:r>
+            <a:r>
+              <a:rPr lang="ko-KR" altLang="en-US" b="1" dirty="0">
+                <a:effectLst/>
+                <a:latin typeface="Noto Sans KR" panose="020B0200000000000000" pitchFamily="34" charset="-128"/>
+                <a:ea typeface="Noto Sans KR" panose="020B0200000000000000" pitchFamily="34" charset="-128"/>
+              </a:rPr>
+              <a:t>월</a:t>
+            </a:r>
+            <a:r>
+              <a:rPr lang="en-US" altLang="ko-KR" b="1" dirty="0">
+                <a:effectLst/>
+                <a:latin typeface="Noto Sans KR" panose="020B0200000000000000" pitchFamily="34" charset="-128"/>
+                <a:ea typeface="Noto Sans KR" panose="020B0200000000000000" pitchFamily="34" charset="-128"/>
+              </a:rPr>
+              <a:t>) </a:t>
+            </a:r>
+            <a:r>
+              <a:rPr lang="en" altLang="ko-KR" b="1" dirty="0">
+                <a:effectLst/>
+                <a:latin typeface="Noto Sans KR" panose="020B0200000000000000" pitchFamily="34" charset="-128"/>
+                <a:ea typeface="Noto Sans KR" panose="020B0200000000000000" pitchFamily="34" charset="-128"/>
+              </a:rPr>
+              <a:t>– 11. </a:t>
+            </a:r>
+            <a:r>
+              <a:rPr lang="en-US" altLang="ko-KR" b="1" dirty="0">
+                <a:effectLst/>
+                <a:latin typeface="Noto Sans KR" panose="020B0200000000000000" pitchFamily="34" charset="-128"/>
+                <a:ea typeface="Noto Sans KR" panose="020B0200000000000000" pitchFamily="34" charset="-128"/>
+              </a:rPr>
+              <a:t>18</a:t>
+            </a:r>
+            <a:r>
+              <a:rPr lang="en" altLang="ko-KR" b="1" dirty="0">
+                <a:effectLst/>
+                <a:latin typeface="Noto Sans KR" panose="020B0200000000000000" pitchFamily="34" charset="-128"/>
+                <a:ea typeface="Noto Sans KR" panose="020B0200000000000000" pitchFamily="34" charset="-128"/>
+              </a:rPr>
+              <a:t>(</a:t>
+            </a:r>
+            <a:r>
+              <a:rPr lang="ko-KR" altLang="en-US" b="1" dirty="0">
+                <a:effectLst/>
+                <a:latin typeface="Noto Sans KR" panose="020B0200000000000000" pitchFamily="34" charset="-128"/>
+                <a:ea typeface="Noto Sans KR" panose="020B0200000000000000" pitchFamily="34" charset="-128"/>
+              </a:rPr>
+              <a:t>화</a:t>
+            </a:r>
+            <a:r>
+              <a:rPr lang="en-US" altLang="ko-KR" b="1" dirty="0">
+                <a:effectLst/>
+                <a:latin typeface="Noto Sans KR" panose="020B0200000000000000" pitchFamily="34" charset="-128"/>
+                <a:ea typeface="Noto Sans KR" panose="020B0200000000000000" pitchFamily="34" charset="-128"/>
+              </a:rPr>
+              <a:t>)</a:t>
+            </a:r>
+            <a:endParaRPr lang="en" altLang="ko-KR" b="1" dirty="0">
+              <a:effectLst/>
+              <a:latin typeface="Noto Sans KR" panose="020B0200000000000000" pitchFamily="34" charset="-128"/>
+              <a:ea typeface="Noto Sans KR" panose="020B0200000000000000" pitchFamily="34" charset="-128"/>
+            </a:endParaRPr>
+          </a:p>
+        </p:txBody>
+      </p:sp>
+      <p:sp>
+        <p:nvSpPr>
+          <p:cNvPr id="17" name="TextBox 16">
+            <a:extLst>
+              <a:ext uri="{FF2B5EF4-FFF2-40B4-BE49-F238E27FC236}">
+                <a16:creationId xmlns:a16="http://schemas.microsoft.com/office/drawing/2014/main" id="{D6CB0D2E-26B6-DBBE-6102-66D5725EA3A2}"/>
+              </a:ext>
+            </a:extLst>
+          </p:cNvPr>
+          <p:cNvSpPr txBox="1"/>
+          <p:nvPr/>
+        </p:nvSpPr>
+        <p:spPr>
+          <a:xfrm>
+            <a:off x="1373072" y="6050346"/>
+            <a:ext cx="3881191" cy="584775"/>
+          </a:xfrm>
+          <a:prstGeom prst="rect">
+            <a:avLst/>
+          </a:prstGeom>
+          <a:noFill/>
+        </p:spPr>
+        <p:txBody>
+          <a:bodyPr wrap="none" rtlCol="0">
+            <a:spAutoFit/>
+          </a:bodyPr>
+          <a:lstStyle/>
+          <a:p>
+            <a:r>
+              <a:rPr kumimoji="1" lang="ko-KR" altLang="en-US" sz="3200" b="1" dirty="0" err="1">
+                <a:latin typeface="Noto Sans KR" panose="020B0200000000000000" pitchFamily="34" charset="-128"/>
+                <a:ea typeface="Noto Sans KR" panose="020B0200000000000000" pitchFamily="34" charset="-128"/>
+              </a:rPr>
+              <a:t>아이펠</a:t>
+            </a:r>
+            <a:r>
+              <a:rPr kumimoji="1" lang="ko-KR" altLang="en-US" sz="3200" b="1" dirty="0">
+                <a:latin typeface="Noto Sans KR" panose="020B0200000000000000" pitchFamily="34" charset="-128"/>
+                <a:ea typeface="Noto Sans KR" panose="020B0200000000000000" pitchFamily="34" charset="-128"/>
+              </a:rPr>
+              <a:t> 코어과정 </a:t>
+            </a:r>
+            <a:r>
+              <a:rPr kumimoji="1" lang="en-US" altLang="ko-KR" sz="3200" b="1" dirty="0">
+                <a:latin typeface="Noto Sans KR" panose="020B0200000000000000" pitchFamily="34" charset="-128"/>
+                <a:ea typeface="Noto Sans KR" panose="020B0200000000000000" pitchFamily="34" charset="-128"/>
+              </a:rPr>
+              <a:t>11</a:t>
+            </a:r>
+            <a:r>
+              <a:rPr kumimoji="1" lang="ko-KR" altLang="en-US" sz="3200" b="1" dirty="0">
+                <a:latin typeface="Noto Sans KR" panose="020B0200000000000000" pitchFamily="34" charset="-128"/>
+                <a:ea typeface="Noto Sans KR" panose="020B0200000000000000" pitchFamily="34" charset="-128"/>
+              </a:rPr>
+              <a:t>기</a:t>
+            </a:r>
+          </a:p>
+        </p:txBody>
+      </p:sp>
+      <p:pic>
+        <p:nvPicPr>
+          <p:cNvPr id="18" name="그림 17">
+            <a:extLst>
+              <a:ext uri="{FF2B5EF4-FFF2-40B4-BE49-F238E27FC236}">
+                <a16:creationId xmlns:a16="http://schemas.microsoft.com/office/drawing/2014/main" id="{0374985B-97CA-C951-7325-F19CBA9B1A96}"/>
+              </a:ext>
+            </a:extLst>
+          </p:cNvPr>
+          <p:cNvPicPr>
+            <a:picLocks noChangeAspect="1"/>
+          </p:cNvPicPr>
+          <p:nvPr/>
+        </p:nvPicPr>
+        <p:blipFill>
+          <a:blip r:embed="rId5"/>
+          <a:stretch>
+            <a:fillRect/>
+          </a:stretch>
+        </p:blipFill>
+        <p:spPr>
+          <a:xfrm>
+            <a:off x="9253057" y="6691390"/>
+            <a:ext cx="1166070" cy="671899"/>
+          </a:xfrm>
+          <a:prstGeom prst="rect">
+            <a:avLst/>
+          </a:prstGeom>
+        </p:spPr>
+      </p:pic>
     </p:spTree>
     <p:extLst>
       <p:ext uri="{BB962C8B-B14F-4D97-AF65-F5344CB8AC3E}">
@@ -3882,6 +5087,309 @@
           <a:chExt cx="0" cy="0"/>
         </a:xfrm>
       </p:grpSpPr>
+      <p:sp>
+        <p:nvSpPr>
+          <p:cNvPr id="2" name="모서리가 둥근 직사각형 1">
+            <a:extLst>
+              <a:ext uri="{FF2B5EF4-FFF2-40B4-BE49-F238E27FC236}">
+                <a16:creationId xmlns:a16="http://schemas.microsoft.com/office/drawing/2014/main" id="{8468A9AB-125B-0E5E-3C74-CD18661E43CA}"/>
+              </a:ext>
+            </a:extLst>
+          </p:cNvPr>
+          <p:cNvSpPr/>
+          <p:nvPr/>
+        </p:nvSpPr>
+        <p:spPr>
+          <a:xfrm>
+            <a:off x="945931" y="923446"/>
+            <a:ext cx="9669517" cy="1593251"/>
+          </a:xfrm>
+          <a:prstGeom prst="roundRect">
+            <a:avLst>
+              <a:gd name="adj" fmla="val 4579"/>
+            </a:avLst>
+          </a:prstGeom>
+          <a:solidFill>
+            <a:schemeClr val="tx1"/>
+          </a:solidFill>
+          <a:ln w="6350">
+            <a:solidFill>
+              <a:schemeClr val="bg1">
+                <a:lumMod val="75000"/>
+              </a:schemeClr>
+            </a:solidFill>
+          </a:ln>
+        </p:spPr>
+        <p:style>
+          <a:lnRef idx="2">
+            <a:schemeClr val="accent1">
+              <a:shade val="15000"/>
+            </a:schemeClr>
+          </a:lnRef>
+          <a:fillRef idx="1">
+            <a:schemeClr val="accent1"/>
+          </a:fillRef>
+          <a:effectRef idx="0">
+            <a:schemeClr val="accent1"/>
+          </a:effectRef>
+          <a:fontRef idx="minor">
+            <a:schemeClr val="lt1"/>
+          </a:fontRef>
+        </p:style>
+        <p:txBody>
+          <a:bodyPr rtlCol="0" anchor="ctr"/>
+          <a:lstStyle/>
+          <a:p>
+            <a:pPr algn="ctr"/>
+            <a:endParaRPr kumimoji="1" lang="ko-KR" altLang="en-US" dirty="0"/>
+          </a:p>
+        </p:txBody>
+      </p:sp>
+      <p:sp>
+        <p:nvSpPr>
+          <p:cNvPr id="4" name="TextBox 3">
+            <a:extLst>
+              <a:ext uri="{FF2B5EF4-FFF2-40B4-BE49-F238E27FC236}">
+                <a16:creationId xmlns:a16="http://schemas.microsoft.com/office/drawing/2014/main" id="{1EA0989E-F485-D4FA-96EA-2FD0C39BFA7C}"/>
+              </a:ext>
+            </a:extLst>
+          </p:cNvPr>
+          <p:cNvSpPr txBox="1"/>
+          <p:nvPr/>
+        </p:nvSpPr>
+        <p:spPr>
+          <a:xfrm>
+            <a:off x="6635692" y="1472541"/>
+            <a:ext cx="1697901" cy="584775"/>
+          </a:xfrm>
+          <a:prstGeom prst="rect">
+            <a:avLst/>
+          </a:prstGeom>
+          <a:noFill/>
+        </p:spPr>
+        <p:txBody>
+          <a:bodyPr wrap="none" rtlCol="0">
+            <a:spAutoFit/>
+          </a:bodyPr>
+          <a:lstStyle/>
+          <a:p>
+            <a:r>
+              <a:rPr kumimoji="1" lang="ko-KR" altLang="en-US" sz="3200" b="1" dirty="0" err="1">
+                <a:solidFill>
+                  <a:srgbClr val="E8E8E8"/>
+                </a:solidFill>
+                <a:highlight>
+                  <a:srgbClr val="121212"/>
+                </a:highlight>
+                <a:latin typeface="Noto Sans KR" panose="020B0200000000000000" pitchFamily="34" charset="-128"/>
+                <a:ea typeface="Noto Sans KR" panose="020B0200000000000000" pitchFamily="34" charset="-128"/>
+              </a:rPr>
+              <a:t>다시보기</a:t>
+            </a:r>
+            <a:endParaRPr kumimoji="1" lang="ko-KR" altLang="en-US" sz="3200" b="1" dirty="0">
+              <a:latin typeface="Noto Sans KR" panose="020B0200000000000000" pitchFamily="34" charset="-128"/>
+              <a:ea typeface="Noto Sans KR" panose="020B0200000000000000" pitchFamily="34" charset="-128"/>
+            </a:endParaRPr>
+          </a:p>
+        </p:txBody>
+      </p:sp>
+      <p:pic>
+        <p:nvPicPr>
+          <p:cNvPr id="1026" name="Picture 2" descr="if(kakaoAI)2024">
+            <a:extLst>
+              <a:ext uri="{FF2B5EF4-FFF2-40B4-BE49-F238E27FC236}">
+                <a16:creationId xmlns:a16="http://schemas.microsoft.com/office/drawing/2014/main" id="{4A73B108-B303-CDC8-D07E-7141980B8D1B}"/>
+              </a:ext>
+            </a:extLst>
+          </p:cNvPr>
+          <p:cNvPicPr>
+            <a:picLocks noChangeAspect="1" noChangeArrowheads="1"/>
+          </p:cNvPicPr>
+          <p:nvPr/>
+        </p:nvPicPr>
+        <p:blipFill>
+          <a:blip r:embed="rId2">
+            <a:extLst>
+              <a:ext uri="{28A0092B-C50C-407E-A947-70E740481C1C}">
+                <a14:useLocalDpi xmlns:a14="http://schemas.microsoft.com/office/drawing/2010/main" val="0"/>
+              </a:ext>
+            </a:extLst>
+          </a:blip>
+          <a:srcRect/>
+          <a:stretch>
+            <a:fillRect/>
+          </a:stretch>
+        </p:blipFill>
+        <p:spPr bwMode="auto">
+          <a:xfrm>
+            <a:off x="1242767" y="1340881"/>
+            <a:ext cx="5392925" cy="758380"/>
+          </a:xfrm>
+          <a:prstGeom prst="rect">
+            <a:avLst/>
+          </a:prstGeom>
+          <a:noFill/>
+          <a:extLst>
+            <a:ext uri="{909E8E84-426E-40DD-AFC4-6F175D3DCCD1}">
+              <a14:hiddenFill xmlns:a14="http://schemas.microsoft.com/office/drawing/2010/main">
+                <a:solidFill>
+                  <a:srgbClr val="FFFFFF"/>
+                </a:solidFill>
+              </a14:hiddenFill>
+            </a:ext>
+          </a:extLst>
+        </p:spPr>
+      </p:pic>
+      <p:pic>
+        <p:nvPicPr>
+          <p:cNvPr id="7" name="그림 6" descr="노랑, 그래픽, 상징, 폰트이(가) 표시된 사진&#10;&#10;자동 생성된 설명">
+            <a:extLst>
+              <a:ext uri="{FF2B5EF4-FFF2-40B4-BE49-F238E27FC236}">
+                <a16:creationId xmlns:a16="http://schemas.microsoft.com/office/drawing/2014/main" id="{BAEA1C8D-CDE1-3A4A-7F75-8756BD494862}"/>
+              </a:ext>
+            </a:extLst>
+          </p:cNvPr>
+          <p:cNvPicPr>
+            <a:picLocks noChangeAspect="1"/>
+          </p:cNvPicPr>
+          <p:nvPr/>
+        </p:nvPicPr>
+        <p:blipFill>
+          <a:blip r:embed="rId3"/>
+          <a:stretch>
+            <a:fillRect/>
+          </a:stretch>
+        </p:blipFill>
+        <p:spPr>
+          <a:xfrm>
+            <a:off x="-579583" y="589385"/>
+            <a:ext cx="482600" cy="444500"/>
+          </a:xfrm>
+          <a:prstGeom prst="rect">
+            <a:avLst/>
+          </a:prstGeom>
+        </p:spPr>
+      </p:pic>
+      <p:sp>
+        <p:nvSpPr>
+          <p:cNvPr id="8" name="AutoShape 4" descr="카카오(기업) 로고">
+            <a:extLst>
+              <a:ext uri="{FF2B5EF4-FFF2-40B4-BE49-F238E27FC236}">
+                <a16:creationId xmlns:a16="http://schemas.microsoft.com/office/drawing/2014/main" id="{BC130F58-7722-8935-359C-49BCB2DF1442}"/>
+              </a:ext>
+            </a:extLst>
+          </p:cNvPr>
+          <p:cNvSpPr>
+            <a:spLocks noChangeAspect="1" noChangeArrowheads="1"/>
+          </p:cNvSpPr>
+          <p:nvPr/>
+        </p:nvSpPr>
+        <p:spPr bwMode="auto">
+          <a:xfrm>
+            <a:off x="5943600" y="3276600"/>
+            <a:ext cx="304800" cy="304800"/>
+          </a:xfrm>
+          <a:prstGeom prst="rect">
+            <a:avLst/>
+          </a:prstGeom>
+          <a:noFill/>
+          <a:extLst>
+            <a:ext uri="{909E8E84-426E-40DD-AFC4-6F175D3DCCD1}">
+              <a14:hiddenFill xmlns:a14="http://schemas.microsoft.com/office/drawing/2010/main">
+                <a:solidFill>
+                  <a:srgbClr val="FFFFFF"/>
+                </a:solidFill>
+              </a14:hiddenFill>
+            </a:ext>
+          </a:extLst>
+        </p:spPr>
+        <p:txBody>
+          <a:bodyPr vert="horz" wrap="square" lIns="91440" tIns="45720" rIns="91440" bIns="45720" numCol="1" anchor="t" anchorCtr="0" compatLnSpc="1">
+            <a:prstTxWarp prst="textNoShape">
+              <a:avLst/>
+            </a:prstTxWarp>
+          </a:bodyPr>
+          <a:lstStyle/>
+          <a:p>
+            <a:endParaRPr lang="ko-KR" altLang="en-US"/>
+          </a:p>
+        </p:txBody>
+      </p:sp>
+      <p:sp>
+        <p:nvSpPr>
+          <p:cNvPr id="9" name="AutoShape 6" descr="카카오(기업) 로고">
+            <a:extLst>
+              <a:ext uri="{FF2B5EF4-FFF2-40B4-BE49-F238E27FC236}">
+                <a16:creationId xmlns:a16="http://schemas.microsoft.com/office/drawing/2014/main" id="{C74FB268-DFB5-69A2-7BA9-771FD5A7D86E}"/>
+              </a:ext>
+            </a:extLst>
+          </p:cNvPr>
+          <p:cNvSpPr>
+            <a:spLocks noChangeAspect="1" noChangeArrowheads="1"/>
+          </p:cNvSpPr>
+          <p:nvPr/>
+        </p:nvSpPr>
+        <p:spPr bwMode="auto">
+          <a:xfrm>
+            <a:off x="6095999" y="3428999"/>
+            <a:ext cx="1990987" cy="1990987"/>
+          </a:xfrm>
+          <a:prstGeom prst="rect">
+            <a:avLst/>
+          </a:prstGeom>
+          <a:noFill/>
+          <a:extLst>
+            <a:ext uri="{909E8E84-426E-40DD-AFC4-6F175D3DCCD1}">
+              <a14:hiddenFill xmlns:a14="http://schemas.microsoft.com/office/drawing/2010/main">
+                <a:solidFill>
+                  <a:srgbClr val="FFFFFF"/>
+                </a:solidFill>
+              </a14:hiddenFill>
+            </a:ext>
+          </a:extLst>
+        </p:spPr>
+        <p:txBody>
+          <a:bodyPr vert="horz" wrap="square" lIns="91440" tIns="45720" rIns="91440" bIns="45720" numCol="1" anchor="t" anchorCtr="0" compatLnSpc="1">
+            <a:prstTxWarp prst="textNoShape">
+              <a:avLst/>
+            </a:prstTxWarp>
+          </a:bodyPr>
+          <a:lstStyle/>
+          <a:p>
+            <a:endParaRPr lang="ko-KR" altLang="en-US"/>
+          </a:p>
+        </p:txBody>
+      </p:sp>
+      <p:pic>
+        <p:nvPicPr>
+          <p:cNvPr id="15" name="그림 14" descr="로고, 그래픽, 상징, 스크린샷이(가) 표시된 사진&#10;&#10;자동 생성된 설명">
+            <a:extLst>
+              <a:ext uri="{FF2B5EF4-FFF2-40B4-BE49-F238E27FC236}">
+                <a16:creationId xmlns:a16="http://schemas.microsoft.com/office/drawing/2014/main" id="{7D28E89A-1E52-5BA3-CA86-788D6E3A91BA}"/>
+              </a:ext>
+            </a:extLst>
+          </p:cNvPr>
+          <p:cNvPicPr>
+            <a:picLocks noChangeAspect="1"/>
+          </p:cNvPicPr>
+          <p:nvPr/>
+        </p:nvPicPr>
+        <p:blipFill>
+          <a:blip r:embed="rId4"/>
+          <a:stretch>
+            <a:fillRect/>
+          </a:stretch>
+        </p:blipFill>
+        <p:spPr>
+          <a:xfrm>
+            <a:off x="9585732" y="1340880"/>
+            <a:ext cx="758381" cy="758381"/>
+          </a:xfrm>
+          <a:prstGeom prst="rect">
+            <a:avLst/>
+          </a:prstGeom>
+        </p:spPr>
+      </p:pic>
     </p:spTree>
     <p:extLst>
       <p:ext uri="{BB962C8B-B14F-4D97-AF65-F5344CB8AC3E}">
@@ -4328,4 +5836,319 @@
     </a:ext>
   </a:extLst>
 </a:theme>
+</file>
+
+<file path=ppt/theme/theme2.xml><?xml version="1.0" encoding="utf-8"?>
+<a:theme xmlns:a="http://schemas.openxmlformats.org/drawingml/2006/main" name="Office 테마">
+  <a:themeElements>
+    <a:clrScheme name="Office">
+      <a:dk1>
+        <a:sysClr val="windowText" lastClr="000000"/>
+      </a:dk1>
+      <a:lt1>
+        <a:sysClr val="window" lastClr="FFFFFF"/>
+      </a:lt1>
+      <a:dk2>
+        <a:srgbClr val="0E2841"/>
+      </a:dk2>
+      <a:lt2>
+        <a:srgbClr val="E8E8E8"/>
+      </a:lt2>
+      <a:accent1>
+        <a:srgbClr val="156082"/>
+      </a:accent1>
+      <a:accent2>
+        <a:srgbClr val="E97132"/>
+      </a:accent2>
+      <a:accent3>
+        <a:srgbClr val="196B24"/>
+      </a:accent3>
+      <a:accent4>
+        <a:srgbClr val="0F9ED5"/>
+      </a:accent4>
+      <a:accent5>
+        <a:srgbClr val="A02B93"/>
+      </a:accent5>
+      <a:accent6>
+        <a:srgbClr val="4EA72E"/>
+      </a:accent6>
+      <a:hlink>
+        <a:srgbClr val="467886"/>
+      </a:hlink>
+      <a:folHlink>
+        <a:srgbClr val="96607D"/>
+      </a:folHlink>
+    </a:clrScheme>
+    <a:fontScheme name="Office">
+      <a:majorFont>
+        <a:latin typeface="맑은 고딕" panose="02110004020202020204"/>
+        <a:ea typeface=""/>
+        <a:cs typeface=""/>
+        <a:font script="Jpan" typeface="游ゴシック Light"/>
+        <a:font script="Hang" typeface="맑은 고딕"/>
+        <a:font script="Hans" typeface="等线 Light"/>
+        <a:font script="Hant" typeface="新細明體"/>
+        <a:font script="Arab" typeface="Times New Roman"/>
+        <a:font script="Hebr" typeface="Times New Roman"/>
+        <a:font script="Thai" typeface="Angsana New"/>
+        <a:font script="Ethi" typeface="Nyala"/>
+        <a:font script="Beng" typeface="Vrinda"/>
+        <a:font script="Gujr" typeface="Shruti"/>
+        <a:font script="Khmr" typeface="MoolBoran"/>
+        <a:font script="Knda" typeface="Tunga"/>
+        <a:font script="Guru" typeface="Raavi"/>
+        <a:font script="Cans" typeface="Euphemia"/>
+        <a:font script="Cher" typeface="Plantagenet Cherokee"/>
+        <a:font script="Yiii" typeface="Microsoft Yi Baiti"/>
+        <a:font script="Tibt" typeface="Microsoft Himalaya"/>
+        <a:font script="Thaa" typeface="MV Boli"/>
+        <a:font script="Deva" typeface="Mangal"/>
+        <a:font script="Telu" typeface="Gautami"/>
+        <a:font script="Taml" typeface="Latha"/>
+        <a:font script="Syrc" typeface="Estrangelo Edessa"/>
+        <a:font script="Orya" typeface="Kalinga"/>
+        <a:font script="Mlym" typeface="Kartika"/>
+        <a:font script="Laoo" typeface="DokChampa"/>
+        <a:font script="Sinh" typeface="Iskoola Pota"/>
+        <a:font script="Mong" typeface="Mongolian Baiti"/>
+        <a:font script="Viet" typeface="Times New Roman"/>
+        <a:font script="Uigh" typeface="Microsoft Uighur"/>
+        <a:font script="Geor" typeface="Sylfaen"/>
+        <a:font script="Armn" typeface="Arial"/>
+        <a:font script="Bugi" typeface="Leelawadee UI"/>
+        <a:font script="Bopo" typeface="Microsoft JhengHei"/>
+        <a:font script="Java" typeface="Javanese Text"/>
+        <a:font script="Lisu" typeface="Segoe UI"/>
+        <a:font script="Mymr" typeface="Myanmar Text"/>
+        <a:font script="Nkoo" typeface="Ebrima"/>
+        <a:font script="Olck" typeface="Nirmala UI"/>
+        <a:font script="Osma" typeface="Ebrima"/>
+        <a:font script="Phag" typeface="Phagspa"/>
+        <a:font script="Syrn" typeface="Estrangelo Edessa"/>
+        <a:font script="Syrj" typeface="Estrangelo Edessa"/>
+        <a:font script="Syre" typeface="Estrangelo Edessa"/>
+        <a:font script="Sora" typeface="Nirmala UI"/>
+        <a:font script="Tale" typeface="Microsoft Tai Le"/>
+        <a:font script="Talu" typeface="Microsoft New Tai Lue"/>
+        <a:font script="Tfng" typeface="Ebrima"/>
+      </a:majorFont>
+      <a:minorFont>
+        <a:latin typeface="맑은 고딕" panose="02110004020202020204"/>
+        <a:ea typeface=""/>
+        <a:cs typeface=""/>
+        <a:font script="Jpan" typeface="游ゴシック"/>
+        <a:font script="Hang" typeface="맑은 고딕"/>
+        <a:font script="Hans" typeface="等线"/>
+        <a:font script="Hant" typeface="新細明體"/>
+        <a:font script="Arab" typeface="Arial"/>
+        <a:font script="Hebr" typeface="Arial"/>
+        <a:font script="Thai" typeface="Cordia New"/>
+        <a:font script="Ethi" typeface="Nyala"/>
+        <a:font script="Beng" typeface="Vrinda"/>
+        <a:font script="Gujr" typeface="Shruti"/>
+        <a:font script="Khmr" typeface="DaunPenh"/>
+        <a:font script="Knda" typeface="Tunga"/>
+        <a:font script="Guru" typeface="Raavi"/>
+        <a:font script="Cans" typeface="Euphemia"/>
+        <a:font script="Cher" typeface="Plantagenet Cherokee"/>
+        <a:font script="Yiii" typeface="Microsoft Yi Baiti"/>
+        <a:font script="Tibt" typeface="Microsoft Himalaya"/>
+        <a:font script="Thaa" typeface="MV Boli"/>
+        <a:font script="Deva" typeface="Mangal"/>
+        <a:font script="Telu" typeface="Gautami"/>
+        <a:font script="Taml" typeface="Latha"/>
+        <a:font script="Syrc" typeface="Estrangelo Edessa"/>
+        <a:font script="Orya" typeface="Kalinga"/>
+        <a:font script="Mlym" typeface="Kartika"/>
+        <a:font script="Laoo" typeface="DokChampa"/>
+        <a:font script="Sinh" typeface="Iskoola Pota"/>
+        <a:font script="Mong" typeface="Mongolian Baiti"/>
+        <a:font script="Viet" typeface="Arial"/>
+        <a:font script="Uigh" typeface="Microsoft Uighur"/>
+        <a:font script="Geor" typeface="Sylfaen"/>
+        <a:font script="Armn" typeface="Arial"/>
+        <a:font script="Bugi" typeface="Leelawadee UI"/>
+        <a:font script="Bopo" typeface="Microsoft JhengHei"/>
+        <a:font script="Java" typeface="Javanese Text"/>
+        <a:font script="Lisu" typeface="Segoe UI"/>
+        <a:font script="Mymr" typeface="Myanmar Text"/>
+        <a:font script="Nkoo" typeface="Ebrima"/>
+        <a:font script="Olck" typeface="Nirmala UI"/>
+        <a:font script="Osma" typeface="Ebrima"/>
+        <a:font script="Phag" typeface="Phagspa"/>
+        <a:font script="Syrn" typeface="Estrangelo Edessa"/>
+        <a:font script="Syrj" typeface="Estrangelo Edessa"/>
+        <a:font script="Syre" typeface="Estrangelo Edessa"/>
+        <a:font script="Sora" typeface="Nirmala UI"/>
+        <a:font script="Tale" typeface="Microsoft Tai Le"/>
+        <a:font script="Talu" typeface="Microsoft New Tai Lue"/>
+        <a:font script="Tfng" typeface="Ebrima"/>
+      </a:minorFont>
+    </a:fontScheme>
+    <a:fmtScheme name="Office">
+      <a:fillStyleLst>
+        <a:solidFill>
+          <a:schemeClr val="phClr"/>
+        </a:solidFill>
+        <a:gradFill rotWithShape="1">
+          <a:gsLst>
+            <a:gs pos="0">
+              <a:schemeClr val="phClr">
+                <a:lumMod val="110000"/>
+                <a:satMod val="105000"/>
+                <a:tint val="67000"/>
+              </a:schemeClr>
+            </a:gs>
+            <a:gs pos="50000">
+              <a:schemeClr val="phClr">
+                <a:lumMod val="105000"/>
+                <a:satMod val="103000"/>
+                <a:tint val="73000"/>
+              </a:schemeClr>
+            </a:gs>
+            <a:gs pos="100000">
+              <a:schemeClr val="phClr">
+                <a:lumMod val="105000"/>
+                <a:satMod val="109000"/>
+                <a:tint val="81000"/>
+              </a:schemeClr>
+            </a:gs>
+          </a:gsLst>
+          <a:lin ang="5400000" scaled="0"/>
+        </a:gradFill>
+        <a:gradFill rotWithShape="1">
+          <a:gsLst>
+            <a:gs pos="0">
+              <a:schemeClr val="phClr">
+                <a:satMod val="103000"/>
+                <a:lumMod val="102000"/>
+                <a:tint val="94000"/>
+              </a:schemeClr>
+            </a:gs>
+            <a:gs pos="50000">
+              <a:schemeClr val="phClr">
+                <a:satMod val="110000"/>
+                <a:lumMod val="100000"/>
+                <a:shade val="100000"/>
+              </a:schemeClr>
+            </a:gs>
+            <a:gs pos="100000">
+              <a:schemeClr val="phClr">
+                <a:lumMod val="99000"/>
+                <a:satMod val="120000"/>
+                <a:shade val="78000"/>
+              </a:schemeClr>
+            </a:gs>
+          </a:gsLst>
+          <a:lin ang="5400000" scaled="0"/>
+        </a:gradFill>
+      </a:fillStyleLst>
+      <a:lnStyleLst>
+        <a:ln w="12700" cap="flat" cmpd="sng" algn="ctr">
+          <a:solidFill>
+            <a:schemeClr val="phClr"/>
+          </a:solidFill>
+          <a:prstDash val="solid"/>
+          <a:miter lim="800000"/>
+        </a:ln>
+        <a:ln w="19050" cap="flat" cmpd="sng" algn="ctr">
+          <a:solidFill>
+            <a:schemeClr val="phClr"/>
+          </a:solidFill>
+          <a:prstDash val="solid"/>
+          <a:miter lim="800000"/>
+        </a:ln>
+        <a:ln w="25400" cap="flat" cmpd="sng" algn="ctr">
+          <a:solidFill>
+            <a:schemeClr val="phClr"/>
+          </a:solidFill>
+          <a:prstDash val="solid"/>
+          <a:miter lim="800000"/>
+        </a:ln>
+      </a:lnStyleLst>
+      <a:effectStyleLst>
+        <a:effectStyle>
+          <a:effectLst/>
+        </a:effectStyle>
+        <a:effectStyle>
+          <a:effectLst/>
+        </a:effectStyle>
+        <a:effectStyle>
+          <a:effectLst>
+            <a:outerShdw blurRad="57150" dist="19050" dir="5400000" algn="ctr" rotWithShape="0">
+              <a:srgbClr val="000000">
+                <a:alpha val="63000"/>
+              </a:srgbClr>
+            </a:outerShdw>
+          </a:effectLst>
+        </a:effectStyle>
+      </a:effectStyleLst>
+      <a:bgFillStyleLst>
+        <a:solidFill>
+          <a:schemeClr val="phClr"/>
+        </a:solidFill>
+        <a:solidFill>
+          <a:schemeClr val="phClr">
+            <a:tint val="95000"/>
+            <a:satMod val="170000"/>
+          </a:schemeClr>
+        </a:solidFill>
+        <a:gradFill rotWithShape="1">
+          <a:gsLst>
+            <a:gs pos="0">
+              <a:schemeClr val="phClr">
+                <a:tint val="93000"/>
+                <a:satMod val="150000"/>
+                <a:shade val="98000"/>
+                <a:lumMod val="102000"/>
+              </a:schemeClr>
+            </a:gs>
+            <a:gs pos="50000">
+              <a:schemeClr val="phClr">
+                <a:tint val="98000"/>
+                <a:satMod val="130000"/>
+                <a:shade val="90000"/>
+                <a:lumMod val="103000"/>
+              </a:schemeClr>
+            </a:gs>
+            <a:gs pos="100000">
+              <a:schemeClr val="phClr">
+                <a:shade val="63000"/>
+                <a:satMod val="120000"/>
+              </a:schemeClr>
+            </a:gs>
+          </a:gsLst>
+          <a:lin ang="5400000" scaled="0"/>
+        </a:gradFill>
+      </a:bgFillStyleLst>
+    </a:fmtScheme>
+  </a:themeElements>
+  <a:objectDefaults>
+    <a:lnDef>
+      <a:spPr/>
+      <a:bodyPr/>
+      <a:lstStyle/>
+      <a:style>
+        <a:lnRef idx="2">
+          <a:schemeClr val="accent1"/>
+        </a:lnRef>
+        <a:fillRef idx="0">
+          <a:schemeClr val="accent1"/>
+        </a:fillRef>
+        <a:effectRef idx="1">
+          <a:schemeClr val="accent1"/>
+        </a:effectRef>
+        <a:fontRef idx="minor">
+          <a:schemeClr val="tx1"/>
+        </a:fontRef>
+      </a:style>
+    </a:lnDef>
+  </a:objectDefaults>
+  <a:extraClrSchemeLst/>
+  <a:extLst>
+    <a:ext uri="{05A4C25C-085E-4340-85A3-A5531E510DB2}">
+      <thm15:themeFamily xmlns:thm15="http://schemas.microsoft.com/office/thememl/2012/main" name="Office Theme" id="{2E142A2C-CD16-42D6-873A-C26D2A0506FA}" vid="{1BDDFF52-6CD6-40A5-AB3C-68EB2F1E4D0A}"/>
+    </a:ext>
+  </a:extLst>
+</a:theme>
 </file>